--- a/public/videos/repositories/publish-flow/publish-flow-tech-preview.pptx
+++ b/public/videos/repositories/publish-flow/publish-flow-tech-preview.pptx
@@ -134,7 +134,7 @@
           <p:cNvPr id="2" name="タイトル 1">
             <a:extLst>
               <a:ext uri="{FF2B5EF4-FFF2-40B4-BE49-F238E27FC236}">
-                <a16:creationId xmlns:a16="http://schemas.microsoft.com/office/drawing/2014/main" id="{3D3AA72E-026E-CDC7-B8F5-8DA092206D80}"/>
+                <a16:creationId xmlns:a16="http://schemas.microsoft.com/office/drawing/2014/main" id="{B31F0762-5B0C-FFB4-FFF0-CDFAB0D2722F}"/>
               </a:ext>
             </a:extLst>
           </p:cNvPr>
@@ -171,7 +171,7 @@
           <p:cNvPr id="3" name="字幕 2">
             <a:extLst>
               <a:ext uri="{FF2B5EF4-FFF2-40B4-BE49-F238E27FC236}">
-                <a16:creationId xmlns:a16="http://schemas.microsoft.com/office/drawing/2014/main" id="{DEECB441-DBE4-2270-D9B6-1E1E66396116}"/>
+                <a16:creationId xmlns:a16="http://schemas.microsoft.com/office/drawing/2014/main" id="{D250B7F8-8D61-9316-D633-F1460890A40E}"/>
               </a:ext>
             </a:extLst>
           </p:cNvPr>
@@ -241,7 +241,7 @@
           <p:cNvPr id="4" name="日付プレースホルダー 3">
             <a:extLst>
               <a:ext uri="{FF2B5EF4-FFF2-40B4-BE49-F238E27FC236}">
-                <a16:creationId xmlns:a16="http://schemas.microsoft.com/office/drawing/2014/main" id="{D5C58071-C91F-548D-7B61-E07C8B4C5BD2}"/>
+                <a16:creationId xmlns:a16="http://schemas.microsoft.com/office/drawing/2014/main" id="{B0873FC5-BDC2-8373-9294-5A9120159AF4}"/>
               </a:ext>
             </a:extLst>
           </p:cNvPr>
@@ -257,7 +257,7 @@
           <a:bodyPr/>
           <a:lstStyle/>
           <a:p>
-            <a:fld id="{082D9B70-97B6-4B28-8800-3130777E9BCA}" type="datetimeFigureOut">
+            <a:fld id="{FA0CE7C4-3E40-4262-A7E1-B2C7E6252526}" type="datetimeFigureOut">
               <a:rPr kumimoji="1" lang="ja-JP" altLang="en-US" smtClean="0"/>
               <a:t>2026/7/30</a:t>
             </a:fld>
@@ -270,7 +270,7 @@
           <p:cNvPr id="5" name="フッター プレースホルダー 4">
             <a:extLst>
               <a:ext uri="{FF2B5EF4-FFF2-40B4-BE49-F238E27FC236}">
-                <a16:creationId xmlns:a16="http://schemas.microsoft.com/office/drawing/2014/main" id="{9EACE75F-9FA6-3F54-D139-D4E2F002B844}"/>
+                <a16:creationId xmlns:a16="http://schemas.microsoft.com/office/drawing/2014/main" id="{8C3DD2B0-A0A9-AAA5-9092-C3545A0FF74C}"/>
               </a:ext>
             </a:extLst>
           </p:cNvPr>
@@ -295,7 +295,7 @@
           <p:cNvPr id="6" name="スライド番号プレースホルダー 5">
             <a:extLst>
               <a:ext uri="{FF2B5EF4-FFF2-40B4-BE49-F238E27FC236}">
-                <a16:creationId xmlns:a16="http://schemas.microsoft.com/office/drawing/2014/main" id="{533663A4-0063-2EBD-AAB6-F556D312480A}"/>
+                <a16:creationId xmlns:a16="http://schemas.microsoft.com/office/drawing/2014/main" id="{C925CFFB-75A1-C04A-BBFB-CF3BC3861E78}"/>
               </a:ext>
             </a:extLst>
           </p:cNvPr>
@@ -311,7 +311,7 @@
           <a:bodyPr/>
           <a:lstStyle/>
           <a:p>
-            <a:fld id="{C84425DB-688B-4482-AE55-6B201D9BBEF1}" type="slidenum">
+            <a:fld id="{613F7437-989D-4ED3-87CB-CCDA4D9B197C}" type="slidenum">
               <a:rPr kumimoji="1" lang="ja-JP" altLang="en-US" smtClean="0"/>
               <a:t>‹#›</a:t>
             </a:fld>
@@ -322,7 +322,7 @@
     </p:spTree>
     <p:extLst>
       <p:ext uri="{BB962C8B-B14F-4D97-AF65-F5344CB8AC3E}">
-        <p14:creationId xmlns:p14="http://schemas.microsoft.com/office/powerpoint/2010/main" val="3296535251"/>
+        <p14:creationId xmlns:p14="http://schemas.microsoft.com/office/powerpoint/2010/main" val="436458917"/>
       </p:ext>
     </p:extLst>
   </p:cSld>
@@ -354,7 +354,7 @@
           <p:cNvPr id="2" name="タイトル 1">
             <a:extLst>
               <a:ext uri="{FF2B5EF4-FFF2-40B4-BE49-F238E27FC236}">
-                <a16:creationId xmlns:a16="http://schemas.microsoft.com/office/drawing/2014/main" id="{DC2AF9F5-7DA4-4B16-73E9-E3C378E70C71}"/>
+                <a16:creationId xmlns:a16="http://schemas.microsoft.com/office/drawing/2014/main" id="{CDB91130-5F78-DF5C-66A0-2F775179CA69}"/>
               </a:ext>
             </a:extLst>
           </p:cNvPr>
@@ -382,7 +382,7 @@
           <p:cNvPr id="3" name="縦書きテキスト プレースホルダー 2">
             <a:extLst>
               <a:ext uri="{FF2B5EF4-FFF2-40B4-BE49-F238E27FC236}">
-                <a16:creationId xmlns:a16="http://schemas.microsoft.com/office/drawing/2014/main" id="{39A4170B-5A23-6CD7-B054-53B30FC25BA1}"/>
+                <a16:creationId xmlns:a16="http://schemas.microsoft.com/office/drawing/2014/main" id="{49436D11-04B0-9AF2-511B-AE8F6B830853}"/>
               </a:ext>
             </a:extLst>
           </p:cNvPr>
@@ -471,7 +471,7 @@
           <p:cNvPr id="4" name="日付プレースホルダー 3">
             <a:extLst>
               <a:ext uri="{FF2B5EF4-FFF2-40B4-BE49-F238E27FC236}">
-                <a16:creationId xmlns:a16="http://schemas.microsoft.com/office/drawing/2014/main" id="{54903060-5427-F2A9-EEBB-17C9C803A0A0}"/>
+                <a16:creationId xmlns:a16="http://schemas.microsoft.com/office/drawing/2014/main" id="{60B1B8F7-6DDA-DC77-CF01-9DDC5A918C7E}"/>
               </a:ext>
             </a:extLst>
           </p:cNvPr>
@@ -487,7 +487,7 @@
           <a:bodyPr/>
           <a:lstStyle/>
           <a:p>
-            <a:fld id="{082D9B70-97B6-4B28-8800-3130777E9BCA}" type="datetimeFigureOut">
+            <a:fld id="{FA0CE7C4-3E40-4262-A7E1-B2C7E6252526}" type="datetimeFigureOut">
               <a:rPr kumimoji="1" lang="ja-JP" altLang="en-US" smtClean="0"/>
               <a:t>2026/7/30</a:t>
             </a:fld>
@@ -500,7 +500,7 @@
           <p:cNvPr id="5" name="フッター プレースホルダー 4">
             <a:extLst>
               <a:ext uri="{FF2B5EF4-FFF2-40B4-BE49-F238E27FC236}">
-                <a16:creationId xmlns:a16="http://schemas.microsoft.com/office/drawing/2014/main" id="{E07732F6-253F-9EE4-D0CE-13383F9EA970}"/>
+                <a16:creationId xmlns:a16="http://schemas.microsoft.com/office/drawing/2014/main" id="{5457B15B-FA25-890F-09AE-B8BD26245AED}"/>
               </a:ext>
             </a:extLst>
           </p:cNvPr>
@@ -525,7 +525,7 @@
           <p:cNvPr id="6" name="スライド番号プレースホルダー 5">
             <a:extLst>
               <a:ext uri="{FF2B5EF4-FFF2-40B4-BE49-F238E27FC236}">
-                <a16:creationId xmlns:a16="http://schemas.microsoft.com/office/drawing/2014/main" id="{8AF1FD4B-ED36-F70B-93AD-3B74229C41B0}"/>
+                <a16:creationId xmlns:a16="http://schemas.microsoft.com/office/drawing/2014/main" id="{900D88A5-E1FE-B58F-5277-CBA162ACE135}"/>
               </a:ext>
             </a:extLst>
           </p:cNvPr>
@@ -541,7 +541,7 @@
           <a:bodyPr/>
           <a:lstStyle/>
           <a:p>
-            <a:fld id="{C84425DB-688B-4482-AE55-6B201D9BBEF1}" type="slidenum">
+            <a:fld id="{613F7437-989D-4ED3-87CB-CCDA4D9B197C}" type="slidenum">
               <a:rPr kumimoji="1" lang="ja-JP" altLang="en-US" smtClean="0"/>
               <a:t>‹#›</a:t>
             </a:fld>
@@ -552,7 +552,7 @@
     </p:spTree>
     <p:extLst>
       <p:ext uri="{BB962C8B-B14F-4D97-AF65-F5344CB8AC3E}">
-        <p14:creationId xmlns:p14="http://schemas.microsoft.com/office/powerpoint/2010/main" val="361434646"/>
+        <p14:creationId xmlns:p14="http://schemas.microsoft.com/office/powerpoint/2010/main" val="569683473"/>
       </p:ext>
     </p:extLst>
   </p:cSld>
@@ -584,7 +584,7 @@
           <p:cNvPr id="2" name="縦書きタイトル 1">
             <a:extLst>
               <a:ext uri="{FF2B5EF4-FFF2-40B4-BE49-F238E27FC236}">
-                <a16:creationId xmlns:a16="http://schemas.microsoft.com/office/drawing/2014/main" id="{502B03FC-C835-CE26-0E11-64650FD0759A}"/>
+                <a16:creationId xmlns:a16="http://schemas.microsoft.com/office/drawing/2014/main" id="{6A494643-3DA5-6D53-25CC-1C76A7C2FA22}"/>
               </a:ext>
             </a:extLst>
           </p:cNvPr>
@@ -617,7 +617,7 @@
           <p:cNvPr id="3" name="縦書きテキスト プレースホルダー 2">
             <a:extLst>
               <a:ext uri="{FF2B5EF4-FFF2-40B4-BE49-F238E27FC236}">
-                <a16:creationId xmlns:a16="http://schemas.microsoft.com/office/drawing/2014/main" id="{923D2101-2B0C-D53C-0EA0-E06C53E01227}"/>
+                <a16:creationId xmlns:a16="http://schemas.microsoft.com/office/drawing/2014/main" id="{91096088-DD5B-58D9-563E-5547B506A4F9}"/>
               </a:ext>
             </a:extLst>
           </p:cNvPr>
@@ -711,7 +711,7 @@
           <p:cNvPr id="4" name="日付プレースホルダー 3">
             <a:extLst>
               <a:ext uri="{FF2B5EF4-FFF2-40B4-BE49-F238E27FC236}">
-                <a16:creationId xmlns:a16="http://schemas.microsoft.com/office/drawing/2014/main" id="{AD8056B3-BB99-A5CD-ADA3-180DEFEAD5A7}"/>
+                <a16:creationId xmlns:a16="http://schemas.microsoft.com/office/drawing/2014/main" id="{95D9AD85-7263-A67D-2131-8F5B8C746BA0}"/>
               </a:ext>
             </a:extLst>
           </p:cNvPr>
@@ -727,7 +727,7 @@
           <a:bodyPr/>
           <a:lstStyle/>
           <a:p>
-            <a:fld id="{082D9B70-97B6-4B28-8800-3130777E9BCA}" type="datetimeFigureOut">
+            <a:fld id="{FA0CE7C4-3E40-4262-A7E1-B2C7E6252526}" type="datetimeFigureOut">
               <a:rPr kumimoji="1" lang="ja-JP" altLang="en-US" smtClean="0"/>
               <a:t>2026/7/30</a:t>
             </a:fld>
@@ -740,7 +740,7 @@
           <p:cNvPr id="5" name="フッター プレースホルダー 4">
             <a:extLst>
               <a:ext uri="{FF2B5EF4-FFF2-40B4-BE49-F238E27FC236}">
-                <a16:creationId xmlns:a16="http://schemas.microsoft.com/office/drawing/2014/main" id="{144528F5-EFC8-9122-DB04-6F8D1DD82A93}"/>
+                <a16:creationId xmlns:a16="http://schemas.microsoft.com/office/drawing/2014/main" id="{EA44702C-4F0D-0DBE-2439-13DFB90B4497}"/>
               </a:ext>
             </a:extLst>
           </p:cNvPr>
@@ -765,7 +765,7 @@
           <p:cNvPr id="6" name="スライド番号プレースホルダー 5">
             <a:extLst>
               <a:ext uri="{FF2B5EF4-FFF2-40B4-BE49-F238E27FC236}">
-                <a16:creationId xmlns:a16="http://schemas.microsoft.com/office/drawing/2014/main" id="{AFE614AD-B343-9D9A-3156-5FDB06EF545B}"/>
+                <a16:creationId xmlns:a16="http://schemas.microsoft.com/office/drawing/2014/main" id="{412EECE4-0442-7A86-5CCC-31808884905D}"/>
               </a:ext>
             </a:extLst>
           </p:cNvPr>
@@ -781,7 +781,7 @@
           <a:bodyPr/>
           <a:lstStyle/>
           <a:p>
-            <a:fld id="{C84425DB-688B-4482-AE55-6B201D9BBEF1}" type="slidenum">
+            <a:fld id="{613F7437-989D-4ED3-87CB-CCDA4D9B197C}" type="slidenum">
               <a:rPr kumimoji="1" lang="ja-JP" altLang="en-US" smtClean="0"/>
               <a:t>‹#›</a:t>
             </a:fld>
@@ -792,7 +792,7 @@
     </p:spTree>
     <p:extLst>
       <p:ext uri="{BB962C8B-B14F-4D97-AF65-F5344CB8AC3E}">
-        <p14:creationId xmlns:p14="http://schemas.microsoft.com/office/powerpoint/2010/main" val="2830454935"/>
+        <p14:creationId xmlns:p14="http://schemas.microsoft.com/office/powerpoint/2010/main" val="1966035006"/>
       </p:ext>
     </p:extLst>
   </p:cSld>
@@ -824,7 +824,7 @@
           <p:cNvPr id="2" name="タイトル 1">
             <a:extLst>
               <a:ext uri="{FF2B5EF4-FFF2-40B4-BE49-F238E27FC236}">
-                <a16:creationId xmlns:a16="http://schemas.microsoft.com/office/drawing/2014/main" id="{B3CDD8DA-3F63-922A-47E0-E9A89142F3F5}"/>
+                <a16:creationId xmlns:a16="http://schemas.microsoft.com/office/drawing/2014/main" id="{DFF15E6E-9D82-9589-4C0D-1083DBC8D9F7}"/>
               </a:ext>
             </a:extLst>
           </p:cNvPr>
@@ -852,7 +852,7 @@
           <p:cNvPr id="3" name="コンテンツ プレースホルダー 2">
             <a:extLst>
               <a:ext uri="{FF2B5EF4-FFF2-40B4-BE49-F238E27FC236}">
-                <a16:creationId xmlns:a16="http://schemas.microsoft.com/office/drawing/2014/main" id="{D0C54F19-6FE5-4580-D644-C203EBDDC460}"/>
+                <a16:creationId xmlns:a16="http://schemas.microsoft.com/office/drawing/2014/main" id="{962793C5-512B-7EDB-C3D0-DF1E19FBDE85}"/>
               </a:ext>
             </a:extLst>
           </p:cNvPr>
@@ -941,7 +941,7 @@
           <p:cNvPr id="4" name="日付プレースホルダー 3">
             <a:extLst>
               <a:ext uri="{FF2B5EF4-FFF2-40B4-BE49-F238E27FC236}">
-                <a16:creationId xmlns:a16="http://schemas.microsoft.com/office/drawing/2014/main" id="{DC2CED7D-4171-F1B1-DC02-BF9D209FF388}"/>
+                <a16:creationId xmlns:a16="http://schemas.microsoft.com/office/drawing/2014/main" id="{1D03ACD9-0FDD-A0A1-B9DC-DFA2A5853842}"/>
               </a:ext>
             </a:extLst>
           </p:cNvPr>
@@ -957,7 +957,7 @@
           <a:bodyPr/>
           <a:lstStyle/>
           <a:p>
-            <a:fld id="{082D9B70-97B6-4B28-8800-3130777E9BCA}" type="datetimeFigureOut">
+            <a:fld id="{FA0CE7C4-3E40-4262-A7E1-B2C7E6252526}" type="datetimeFigureOut">
               <a:rPr kumimoji="1" lang="ja-JP" altLang="en-US" smtClean="0"/>
               <a:t>2026/7/30</a:t>
             </a:fld>
@@ -970,7 +970,7 @@
           <p:cNvPr id="5" name="フッター プレースホルダー 4">
             <a:extLst>
               <a:ext uri="{FF2B5EF4-FFF2-40B4-BE49-F238E27FC236}">
-                <a16:creationId xmlns:a16="http://schemas.microsoft.com/office/drawing/2014/main" id="{7E93035B-0960-9E4C-CD8C-624C6BDA148A}"/>
+                <a16:creationId xmlns:a16="http://schemas.microsoft.com/office/drawing/2014/main" id="{9CAE8B6F-D024-FA95-C53C-18FAFDAF0BE2}"/>
               </a:ext>
             </a:extLst>
           </p:cNvPr>
@@ -995,7 +995,7 @@
           <p:cNvPr id="6" name="スライド番号プレースホルダー 5">
             <a:extLst>
               <a:ext uri="{FF2B5EF4-FFF2-40B4-BE49-F238E27FC236}">
-                <a16:creationId xmlns:a16="http://schemas.microsoft.com/office/drawing/2014/main" id="{8A85DB2E-ABB9-CA57-9AA5-982A1CBE3979}"/>
+                <a16:creationId xmlns:a16="http://schemas.microsoft.com/office/drawing/2014/main" id="{B167BBA4-ED59-E385-B054-E7413EE06445}"/>
               </a:ext>
             </a:extLst>
           </p:cNvPr>
@@ -1011,7 +1011,7 @@
           <a:bodyPr/>
           <a:lstStyle/>
           <a:p>
-            <a:fld id="{C84425DB-688B-4482-AE55-6B201D9BBEF1}" type="slidenum">
+            <a:fld id="{613F7437-989D-4ED3-87CB-CCDA4D9B197C}" type="slidenum">
               <a:rPr kumimoji="1" lang="ja-JP" altLang="en-US" smtClean="0"/>
               <a:t>‹#›</a:t>
             </a:fld>
@@ -1022,7 +1022,7 @@
     </p:spTree>
     <p:extLst>
       <p:ext uri="{BB962C8B-B14F-4D97-AF65-F5344CB8AC3E}">
-        <p14:creationId xmlns:p14="http://schemas.microsoft.com/office/powerpoint/2010/main" val="2854419769"/>
+        <p14:creationId xmlns:p14="http://schemas.microsoft.com/office/powerpoint/2010/main" val="2581180770"/>
       </p:ext>
     </p:extLst>
   </p:cSld>
@@ -1054,7 +1054,7 @@
           <p:cNvPr id="2" name="タイトル 1">
             <a:extLst>
               <a:ext uri="{FF2B5EF4-FFF2-40B4-BE49-F238E27FC236}">
-                <a16:creationId xmlns:a16="http://schemas.microsoft.com/office/drawing/2014/main" id="{D6F9F06C-6663-02FA-A422-3638179E9F7C}"/>
+                <a16:creationId xmlns:a16="http://schemas.microsoft.com/office/drawing/2014/main" id="{0C1C2D2E-BC0F-5557-9944-38AD1DC8D4EF}"/>
               </a:ext>
             </a:extLst>
           </p:cNvPr>
@@ -1091,7 +1091,7 @@
           <p:cNvPr id="3" name="テキスト プレースホルダー 2">
             <a:extLst>
               <a:ext uri="{FF2B5EF4-FFF2-40B4-BE49-F238E27FC236}">
-                <a16:creationId xmlns:a16="http://schemas.microsoft.com/office/drawing/2014/main" id="{A6448031-5332-4B1D-7194-2D82E60FF1AE}"/>
+                <a16:creationId xmlns:a16="http://schemas.microsoft.com/office/drawing/2014/main" id="{2B080EF3-1FC6-58E6-5C8C-42310AA520B9}"/>
               </a:ext>
             </a:extLst>
           </p:cNvPr>
@@ -1216,7 +1216,7 @@
           <p:cNvPr id="4" name="日付プレースホルダー 3">
             <a:extLst>
               <a:ext uri="{FF2B5EF4-FFF2-40B4-BE49-F238E27FC236}">
-                <a16:creationId xmlns:a16="http://schemas.microsoft.com/office/drawing/2014/main" id="{2DE1969F-BBC2-D9E3-C883-4C4CA3BBD4C2}"/>
+                <a16:creationId xmlns:a16="http://schemas.microsoft.com/office/drawing/2014/main" id="{DBF93835-3754-8207-D52A-7A675F2D50C9}"/>
               </a:ext>
             </a:extLst>
           </p:cNvPr>
@@ -1232,7 +1232,7 @@
           <a:bodyPr/>
           <a:lstStyle/>
           <a:p>
-            <a:fld id="{082D9B70-97B6-4B28-8800-3130777E9BCA}" type="datetimeFigureOut">
+            <a:fld id="{FA0CE7C4-3E40-4262-A7E1-B2C7E6252526}" type="datetimeFigureOut">
               <a:rPr kumimoji="1" lang="ja-JP" altLang="en-US" smtClean="0"/>
               <a:t>2026/7/30</a:t>
             </a:fld>
@@ -1245,7 +1245,7 @@
           <p:cNvPr id="5" name="フッター プレースホルダー 4">
             <a:extLst>
               <a:ext uri="{FF2B5EF4-FFF2-40B4-BE49-F238E27FC236}">
-                <a16:creationId xmlns:a16="http://schemas.microsoft.com/office/drawing/2014/main" id="{40D49346-39A1-C60D-F25E-EC3E8D19C225}"/>
+                <a16:creationId xmlns:a16="http://schemas.microsoft.com/office/drawing/2014/main" id="{88C364CA-1E5F-501D-4A8A-C0C868FE7216}"/>
               </a:ext>
             </a:extLst>
           </p:cNvPr>
@@ -1270,7 +1270,7 @@
           <p:cNvPr id="6" name="スライド番号プレースホルダー 5">
             <a:extLst>
               <a:ext uri="{FF2B5EF4-FFF2-40B4-BE49-F238E27FC236}">
-                <a16:creationId xmlns:a16="http://schemas.microsoft.com/office/drawing/2014/main" id="{7E9B592C-6995-93FF-9FBC-55FA163D2A0E}"/>
+                <a16:creationId xmlns:a16="http://schemas.microsoft.com/office/drawing/2014/main" id="{59DF9F64-6386-0EB3-035A-D0776631AE0D}"/>
               </a:ext>
             </a:extLst>
           </p:cNvPr>
@@ -1286,7 +1286,7 @@
           <a:bodyPr/>
           <a:lstStyle/>
           <a:p>
-            <a:fld id="{C84425DB-688B-4482-AE55-6B201D9BBEF1}" type="slidenum">
+            <a:fld id="{613F7437-989D-4ED3-87CB-CCDA4D9B197C}" type="slidenum">
               <a:rPr kumimoji="1" lang="ja-JP" altLang="en-US" smtClean="0"/>
               <a:t>‹#›</a:t>
             </a:fld>
@@ -1297,7 +1297,7 @@
     </p:spTree>
     <p:extLst>
       <p:ext uri="{BB962C8B-B14F-4D97-AF65-F5344CB8AC3E}">
-        <p14:creationId xmlns:p14="http://schemas.microsoft.com/office/powerpoint/2010/main" val="1131284036"/>
+        <p14:creationId xmlns:p14="http://schemas.microsoft.com/office/powerpoint/2010/main" val="1171732010"/>
       </p:ext>
     </p:extLst>
   </p:cSld>
@@ -1329,7 +1329,7 @@
           <p:cNvPr id="2" name="タイトル 1">
             <a:extLst>
               <a:ext uri="{FF2B5EF4-FFF2-40B4-BE49-F238E27FC236}">
-                <a16:creationId xmlns:a16="http://schemas.microsoft.com/office/drawing/2014/main" id="{AB6A0FF2-2FEA-FAA7-09EA-100E3714C95D}"/>
+                <a16:creationId xmlns:a16="http://schemas.microsoft.com/office/drawing/2014/main" id="{7200E9F4-CECA-B09A-28B4-92280DAA30C8}"/>
               </a:ext>
             </a:extLst>
           </p:cNvPr>
@@ -1357,7 +1357,7 @@
           <p:cNvPr id="3" name="コンテンツ プレースホルダー 2">
             <a:extLst>
               <a:ext uri="{FF2B5EF4-FFF2-40B4-BE49-F238E27FC236}">
-                <a16:creationId xmlns:a16="http://schemas.microsoft.com/office/drawing/2014/main" id="{D0CDF375-5F82-C486-F665-C484E2CDE03D}"/>
+                <a16:creationId xmlns:a16="http://schemas.microsoft.com/office/drawing/2014/main" id="{CBD60B0F-CAF7-D47F-0B4B-D92935293C4E}"/>
               </a:ext>
             </a:extLst>
           </p:cNvPr>
@@ -1451,7 +1451,7 @@
           <p:cNvPr id="4" name="コンテンツ プレースホルダー 3">
             <a:extLst>
               <a:ext uri="{FF2B5EF4-FFF2-40B4-BE49-F238E27FC236}">
-                <a16:creationId xmlns:a16="http://schemas.microsoft.com/office/drawing/2014/main" id="{31C65D49-5547-A400-0DC2-2A4D4BE8E6FA}"/>
+                <a16:creationId xmlns:a16="http://schemas.microsoft.com/office/drawing/2014/main" id="{82B4982D-2037-751D-E997-6324A1F84B3C}"/>
               </a:ext>
             </a:extLst>
           </p:cNvPr>
@@ -1545,7 +1545,7 @@
           <p:cNvPr id="5" name="日付プレースホルダー 4">
             <a:extLst>
               <a:ext uri="{FF2B5EF4-FFF2-40B4-BE49-F238E27FC236}">
-                <a16:creationId xmlns:a16="http://schemas.microsoft.com/office/drawing/2014/main" id="{74A46BBB-6D3E-52B2-2FB6-A6A643FF1B6A}"/>
+                <a16:creationId xmlns:a16="http://schemas.microsoft.com/office/drawing/2014/main" id="{428C65D5-B1D8-1AB1-8CC4-B7D3FB33715F}"/>
               </a:ext>
             </a:extLst>
           </p:cNvPr>
@@ -1561,7 +1561,7 @@
           <a:bodyPr/>
           <a:lstStyle/>
           <a:p>
-            <a:fld id="{082D9B70-97B6-4B28-8800-3130777E9BCA}" type="datetimeFigureOut">
+            <a:fld id="{FA0CE7C4-3E40-4262-A7E1-B2C7E6252526}" type="datetimeFigureOut">
               <a:rPr kumimoji="1" lang="ja-JP" altLang="en-US" smtClean="0"/>
               <a:t>2026/7/30</a:t>
             </a:fld>
@@ -1574,7 +1574,7 @@
           <p:cNvPr id="6" name="フッター プレースホルダー 5">
             <a:extLst>
               <a:ext uri="{FF2B5EF4-FFF2-40B4-BE49-F238E27FC236}">
-                <a16:creationId xmlns:a16="http://schemas.microsoft.com/office/drawing/2014/main" id="{11729024-4652-1E2E-9AF5-208565762AED}"/>
+                <a16:creationId xmlns:a16="http://schemas.microsoft.com/office/drawing/2014/main" id="{1046A36B-C207-5455-6112-A4784CD1FDE2}"/>
               </a:ext>
             </a:extLst>
           </p:cNvPr>
@@ -1599,7 +1599,7 @@
           <p:cNvPr id="7" name="スライド番号プレースホルダー 6">
             <a:extLst>
               <a:ext uri="{FF2B5EF4-FFF2-40B4-BE49-F238E27FC236}">
-                <a16:creationId xmlns:a16="http://schemas.microsoft.com/office/drawing/2014/main" id="{9340D9B0-40BB-5B39-0702-FB65241DB6FF}"/>
+                <a16:creationId xmlns:a16="http://schemas.microsoft.com/office/drawing/2014/main" id="{4014B28C-F239-EBE4-13E8-EE178AA77B39}"/>
               </a:ext>
             </a:extLst>
           </p:cNvPr>
@@ -1615,7 +1615,7 @@
           <a:bodyPr/>
           <a:lstStyle/>
           <a:p>
-            <a:fld id="{C84425DB-688B-4482-AE55-6B201D9BBEF1}" type="slidenum">
+            <a:fld id="{613F7437-989D-4ED3-87CB-CCDA4D9B197C}" type="slidenum">
               <a:rPr kumimoji="1" lang="ja-JP" altLang="en-US" smtClean="0"/>
               <a:t>‹#›</a:t>
             </a:fld>
@@ -1626,7 +1626,7 @@
     </p:spTree>
     <p:extLst>
       <p:ext uri="{BB962C8B-B14F-4D97-AF65-F5344CB8AC3E}">
-        <p14:creationId xmlns:p14="http://schemas.microsoft.com/office/powerpoint/2010/main" val="784967595"/>
+        <p14:creationId xmlns:p14="http://schemas.microsoft.com/office/powerpoint/2010/main" val="2669481379"/>
       </p:ext>
     </p:extLst>
   </p:cSld>
@@ -1658,7 +1658,7 @@
           <p:cNvPr id="2" name="タイトル 1">
             <a:extLst>
               <a:ext uri="{FF2B5EF4-FFF2-40B4-BE49-F238E27FC236}">
-                <a16:creationId xmlns:a16="http://schemas.microsoft.com/office/drawing/2014/main" id="{59A3E95A-DE08-4EC7-EC28-AA9936489DDD}"/>
+                <a16:creationId xmlns:a16="http://schemas.microsoft.com/office/drawing/2014/main" id="{666A09A3-5246-25B6-0264-A49A204D53C1}"/>
               </a:ext>
             </a:extLst>
           </p:cNvPr>
@@ -1691,7 +1691,7 @@
           <p:cNvPr id="3" name="テキスト プレースホルダー 2">
             <a:extLst>
               <a:ext uri="{FF2B5EF4-FFF2-40B4-BE49-F238E27FC236}">
-                <a16:creationId xmlns:a16="http://schemas.microsoft.com/office/drawing/2014/main" id="{DAC2265F-2474-B8AE-68F1-8B665252FEB3}"/>
+                <a16:creationId xmlns:a16="http://schemas.microsoft.com/office/drawing/2014/main" id="{32F7E8E5-99A5-E0F3-47AC-BF58D6606000}"/>
               </a:ext>
             </a:extLst>
           </p:cNvPr>
@@ -1762,7 +1762,7 @@
           <p:cNvPr id="4" name="コンテンツ プレースホルダー 3">
             <a:extLst>
               <a:ext uri="{FF2B5EF4-FFF2-40B4-BE49-F238E27FC236}">
-                <a16:creationId xmlns:a16="http://schemas.microsoft.com/office/drawing/2014/main" id="{95BD6D8B-F85F-A111-7C47-1590B457DEE6}"/>
+                <a16:creationId xmlns:a16="http://schemas.microsoft.com/office/drawing/2014/main" id="{97F47FFE-9810-2DF0-4413-B877850E5383}"/>
               </a:ext>
             </a:extLst>
           </p:cNvPr>
@@ -1856,7 +1856,7 @@
           <p:cNvPr id="5" name="テキスト プレースホルダー 4">
             <a:extLst>
               <a:ext uri="{FF2B5EF4-FFF2-40B4-BE49-F238E27FC236}">
-                <a16:creationId xmlns:a16="http://schemas.microsoft.com/office/drawing/2014/main" id="{360050B3-AD29-74B7-6A38-1268007F03C4}"/>
+                <a16:creationId xmlns:a16="http://schemas.microsoft.com/office/drawing/2014/main" id="{3E23C76A-8373-EF7C-A36D-48E973095B38}"/>
               </a:ext>
             </a:extLst>
           </p:cNvPr>
@@ -1927,7 +1927,7 @@
           <p:cNvPr id="6" name="コンテンツ プレースホルダー 5">
             <a:extLst>
               <a:ext uri="{FF2B5EF4-FFF2-40B4-BE49-F238E27FC236}">
-                <a16:creationId xmlns:a16="http://schemas.microsoft.com/office/drawing/2014/main" id="{09B9FB9F-B26F-2A5A-599C-11FD42688CFE}"/>
+                <a16:creationId xmlns:a16="http://schemas.microsoft.com/office/drawing/2014/main" id="{F0688259-6918-9D2C-3D00-C68F85986934}"/>
               </a:ext>
             </a:extLst>
           </p:cNvPr>
@@ -2021,7 +2021,7 @@
           <p:cNvPr id="7" name="日付プレースホルダー 6">
             <a:extLst>
               <a:ext uri="{FF2B5EF4-FFF2-40B4-BE49-F238E27FC236}">
-                <a16:creationId xmlns:a16="http://schemas.microsoft.com/office/drawing/2014/main" id="{A43FD064-1922-6D00-C850-9A9251FBE61E}"/>
+                <a16:creationId xmlns:a16="http://schemas.microsoft.com/office/drawing/2014/main" id="{041F54DF-ECC2-9424-82EE-9403B7C7B48A}"/>
               </a:ext>
             </a:extLst>
           </p:cNvPr>
@@ -2037,7 +2037,7 @@
           <a:bodyPr/>
           <a:lstStyle/>
           <a:p>
-            <a:fld id="{082D9B70-97B6-4B28-8800-3130777E9BCA}" type="datetimeFigureOut">
+            <a:fld id="{FA0CE7C4-3E40-4262-A7E1-B2C7E6252526}" type="datetimeFigureOut">
               <a:rPr kumimoji="1" lang="ja-JP" altLang="en-US" smtClean="0"/>
               <a:t>2026/7/30</a:t>
             </a:fld>
@@ -2050,7 +2050,7 @@
           <p:cNvPr id="8" name="フッター プレースホルダー 7">
             <a:extLst>
               <a:ext uri="{FF2B5EF4-FFF2-40B4-BE49-F238E27FC236}">
-                <a16:creationId xmlns:a16="http://schemas.microsoft.com/office/drawing/2014/main" id="{A85D9E08-1AFD-632D-7CB0-BDFF51554887}"/>
+                <a16:creationId xmlns:a16="http://schemas.microsoft.com/office/drawing/2014/main" id="{E7D69A22-2B6A-CDB1-5AFA-340D48A6B0D2}"/>
               </a:ext>
             </a:extLst>
           </p:cNvPr>
@@ -2075,7 +2075,7 @@
           <p:cNvPr id="9" name="スライド番号プレースホルダー 8">
             <a:extLst>
               <a:ext uri="{FF2B5EF4-FFF2-40B4-BE49-F238E27FC236}">
-                <a16:creationId xmlns:a16="http://schemas.microsoft.com/office/drawing/2014/main" id="{57D30258-EA66-8E9F-C3D1-241C8D22357A}"/>
+                <a16:creationId xmlns:a16="http://schemas.microsoft.com/office/drawing/2014/main" id="{019452F7-BA2A-DCD0-C098-AF66C745C6E1}"/>
               </a:ext>
             </a:extLst>
           </p:cNvPr>
@@ -2091,7 +2091,7 @@
           <a:bodyPr/>
           <a:lstStyle/>
           <a:p>
-            <a:fld id="{C84425DB-688B-4482-AE55-6B201D9BBEF1}" type="slidenum">
+            <a:fld id="{613F7437-989D-4ED3-87CB-CCDA4D9B197C}" type="slidenum">
               <a:rPr kumimoji="1" lang="ja-JP" altLang="en-US" smtClean="0"/>
               <a:t>‹#›</a:t>
             </a:fld>
@@ -2102,7 +2102,7 @@
     </p:spTree>
     <p:extLst>
       <p:ext uri="{BB962C8B-B14F-4D97-AF65-F5344CB8AC3E}">
-        <p14:creationId xmlns:p14="http://schemas.microsoft.com/office/powerpoint/2010/main" val="244916182"/>
+        <p14:creationId xmlns:p14="http://schemas.microsoft.com/office/powerpoint/2010/main" val="1980683986"/>
       </p:ext>
     </p:extLst>
   </p:cSld>
@@ -2134,7 +2134,7 @@
           <p:cNvPr id="2" name="タイトル 1">
             <a:extLst>
               <a:ext uri="{FF2B5EF4-FFF2-40B4-BE49-F238E27FC236}">
-                <a16:creationId xmlns:a16="http://schemas.microsoft.com/office/drawing/2014/main" id="{20CC9FFC-1CAD-4AF9-055B-CC41A92CB64D}"/>
+                <a16:creationId xmlns:a16="http://schemas.microsoft.com/office/drawing/2014/main" id="{ACDF0D9C-F1CA-949E-0574-52B9604640B0}"/>
               </a:ext>
             </a:extLst>
           </p:cNvPr>
@@ -2162,7 +2162,7 @@
           <p:cNvPr id="3" name="日付プレースホルダー 2">
             <a:extLst>
               <a:ext uri="{FF2B5EF4-FFF2-40B4-BE49-F238E27FC236}">
-                <a16:creationId xmlns:a16="http://schemas.microsoft.com/office/drawing/2014/main" id="{3876882C-B170-021A-1496-1D5B3EE6CE1C}"/>
+                <a16:creationId xmlns:a16="http://schemas.microsoft.com/office/drawing/2014/main" id="{7E963BF5-9991-54EC-F91C-5F9B3F2CEA84}"/>
               </a:ext>
             </a:extLst>
           </p:cNvPr>
@@ -2178,7 +2178,7 @@
           <a:bodyPr/>
           <a:lstStyle/>
           <a:p>
-            <a:fld id="{082D9B70-97B6-4B28-8800-3130777E9BCA}" type="datetimeFigureOut">
+            <a:fld id="{FA0CE7C4-3E40-4262-A7E1-B2C7E6252526}" type="datetimeFigureOut">
               <a:rPr kumimoji="1" lang="ja-JP" altLang="en-US" smtClean="0"/>
               <a:t>2026/7/30</a:t>
             </a:fld>
@@ -2191,7 +2191,7 @@
           <p:cNvPr id="4" name="フッター プレースホルダー 3">
             <a:extLst>
               <a:ext uri="{FF2B5EF4-FFF2-40B4-BE49-F238E27FC236}">
-                <a16:creationId xmlns:a16="http://schemas.microsoft.com/office/drawing/2014/main" id="{5D08E73E-9718-BD96-DA01-327DDFCF372C}"/>
+                <a16:creationId xmlns:a16="http://schemas.microsoft.com/office/drawing/2014/main" id="{4A0D1620-BE70-8640-912B-B3D35D03823F}"/>
               </a:ext>
             </a:extLst>
           </p:cNvPr>
@@ -2216,7 +2216,7 @@
           <p:cNvPr id="5" name="スライド番号プレースホルダー 4">
             <a:extLst>
               <a:ext uri="{FF2B5EF4-FFF2-40B4-BE49-F238E27FC236}">
-                <a16:creationId xmlns:a16="http://schemas.microsoft.com/office/drawing/2014/main" id="{D411E672-010A-84AD-0A08-B968DBE79E59}"/>
+                <a16:creationId xmlns:a16="http://schemas.microsoft.com/office/drawing/2014/main" id="{891A9D9D-0387-4BE5-E528-5FA65D64B028}"/>
               </a:ext>
             </a:extLst>
           </p:cNvPr>
@@ -2232,7 +2232,7 @@
           <a:bodyPr/>
           <a:lstStyle/>
           <a:p>
-            <a:fld id="{C84425DB-688B-4482-AE55-6B201D9BBEF1}" type="slidenum">
+            <a:fld id="{613F7437-989D-4ED3-87CB-CCDA4D9B197C}" type="slidenum">
               <a:rPr kumimoji="1" lang="ja-JP" altLang="en-US" smtClean="0"/>
               <a:t>‹#›</a:t>
             </a:fld>
@@ -2243,7 +2243,7 @@
     </p:spTree>
     <p:extLst>
       <p:ext uri="{BB962C8B-B14F-4D97-AF65-F5344CB8AC3E}">
-        <p14:creationId xmlns:p14="http://schemas.microsoft.com/office/powerpoint/2010/main" val="213034347"/>
+        <p14:creationId xmlns:p14="http://schemas.microsoft.com/office/powerpoint/2010/main" val="1949866435"/>
       </p:ext>
     </p:extLst>
   </p:cSld>
@@ -2275,7 +2275,7 @@
           <p:cNvPr id="2" name="日付プレースホルダー 1">
             <a:extLst>
               <a:ext uri="{FF2B5EF4-FFF2-40B4-BE49-F238E27FC236}">
-                <a16:creationId xmlns:a16="http://schemas.microsoft.com/office/drawing/2014/main" id="{0A49135B-6CDE-A9B2-92DC-7D620E5FB937}"/>
+                <a16:creationId xmlns:a16="http://schemas.microsoft.com/office/drawing/2014/main" id="{0EE0D283-BA1C-55ED-E4E4-E54971AED007}"/>
               </a:ext>
             </a:extLst>
           </p:cNvPr>
@@ -2291,7 +2291,7 @@
           <a:bodyPr/>
           <a:lstStyle/>
           <a:p>
-            <a:fld id="{082D9B70-97B6-4B28-8800-3130777E9BCA}" type="datetimeFigureOut">
+            <a:fld id="{FA0CE7C4-3E40-4262-A7E1-B2C7E6252526}" type="datetimeFigureOut">
               <a:rPr kumimoji="1" lang="ja-JP" altLang="en-US" smtClean="0"/>
               <a:t>2026/7/30</a:t>
             </a:fld>
@@ -2304,7 +2304,7 @@
           <p:cNvPr id="3" name="フッター プレースホルダー 2">
             <a:extLst>
               <a:ext uri="{FF2B5EF4-FFF2-40B4-BE49-F238E27FC236}">
-                <a16:creationId xmlns:a16="http://schemas.microsoft.com/office/drawing/2014/main" id="{C963219D-EBB4-653A-E44B-065533FABC68}"/>
+                <a16:creationId xmlns:a16="http://schemas.microsoft.com/office/drawing/2014/main" id="{D8F79D62-D6C4-917A-EFA3-4BE16792D6DC}"/>
               </a:ext>
             </a:extLst>
           </p:cNvPr>
@@ -2329,7 +2329,7 @@
           <p:cNvPr id="4" name="スライド番号プレースホルダー 3">
             <a:extLst>
               <a:ext uri="{FF2B5EF4-FFF2-40B4-BE49-F238E27FC236}">
-                <a16:creationId xmlns:a16="http://schemas.microsoft.com/office/drawing/2014/main" id="{C58255B3-96CC-17FA-97FF-AE299FF398CA}"/>
+                <a16:creationId xmlns:a16="http://schemas.microsoft.com/office/drawing/2014/main" id="{DB6CCA3C-2678-B1F8-C117-6BF299612D08}"/>
               </a:ext>
             </a:extLst>
           </p:cNvPr>
@@ -2345,7 +2345,7 @@
           <a:bodyPr/>
           <a:lstStyle/>
           <a:p>
-            <a:fld id="{C84425DB-688B-4482-AE55-6B201D9BBEF1}" type="slidenum">
+            <a:fld id="{613F7437-989D-4ED3-87CB-CCDA4D9B197C}" type="slidenum">
               <a:rPr kumimoji="1" lang="ja-JP" altLang="en-US" smtClean="0"/>
               <a:t>‹#›</a:t>
             </a:fld>
@@ -2356,7 +2356,7 @@
     </p:spTree>
     <p:extLst>
       <p:ext uri="{BB962C8B-B14F-4D97-AF65-F5344CB8AC3E}">
-        <p14:creationId xmlns:p14="http://schemas.microsoft.com/office/powerpoint/2010/main" val="3035288580"/>
+        <p14:creationId xmlns:p14="http://schemas.microsoft.com/office/powerpoint/2010/main" val="2672502590"/>
       </p:ext>
     </p:extLst>
   </p:cSld>
@@ -2388,7 +2388,7 @@
           <p:cNvPr id="2" name="タイトル 1">
             <a:extLst>
               <a:ext uri="{FF2B5EF4-FFF2-40B4-BE49-F238E27FC236}">
-                <a16:creationId xmlns:a16="http://schemas.microsoft.com/office/drawing/2014/main" id="{70CB3B75-D2E4-6C2E-9B0D-1B5DE8E7E781}"/>
+                <a16:creationId xmlns:a16="http://schemas.microsoft.com/office/drawing/2014/main" id="{ED74B3C2-CF7A-F836-50AC-89E142C2BC96}"/>
               </a:ext>
             </a:extLst>
           </p:cNvPr>
@@ -2425,7 +2425,7 @@
           <p:cNvPr id="3" name="コンテンツ プレースホルダー 2">
             <a:extLst>
               <a:ext uri="{FF2B5EF4-FFF2-40B4-BE49-F238E27FC236}">
-                <a16:creationId xmlns:a16="http://schemas.microsoft.com/office/drawing/2014/main" id="{584C1CA6-95E6-BC59-A012-F6C2A80BA994}"/>
+                <a16:creationId xmlns:a16="http://schemas.microsoft.com/office/drawing/2014/main" id="{4E668523-DBF1-AFE6-7E89-4E730DFDC4E9}"/>
               </a:ext>
             </a:extLst>
           </p:cNvPr>
@@ -2547,7 +2547,7 @@
           <p:cNvPr id="4" name="テキスト プレースホルダー 3">
             <a:extLst>
               <a:ext uri="{FF2B5EF4-FFF2-40B4-BE49-F238E27FC236}">
-                <a16:creationId xmlns:a16="http://schemas.microsoft.com/office/drawing/2014/main" id="{6CE08B4F-36FB-C10C-370C-E8383A726774}"/>
+                <a16:creationId xmlns:a16="http://schemas.microsoft.com/office/drawing/2014/main" id="{1869119C-7F79-3EE0-5C78-C87390C1A350}"/>
               </a:ext>
             </a:extLst>
           </p:cNvPr>
@@ -2618,7 +2618,7 @@
           <p:cNvPr id="5" name="日付プレースホルダー 4">
             <a:extLst>
               <a:ext uri="{FF2B5EF4-FFF2-40B4-BE49-F238E27FC236}">
-                <a16:creationId xmlns:a16="http://schemas.microsoft.com/office/drawing/2014/main" id="{42182E9B-81AE-F849-A4BB-78E7B0C53DD6}"/>
+                <a16:creationId xmlns:a16="http://schemas.microsoft.com/office/drawing/2014/main" id="{AB29FC7D-27B0-F73C-8809-F5E0CCE68E33}"/>
               </a:ext>
             </a:extLst>
           </p:cNvPr>
@@ -2634,7 +2634,7 @@
           <a:bodyPr/>
           <a:lstStyle/>
           <a:p>
-            <a:fld id="{082D9B70-97B6-4B28-8800-3130777E9BCA}" type="datetimeFigureOut">
+            <a:fld id="{FA0CE7C4-3E40-4262-A7E1-B2C7E6252526}" type="datetimeFigureOut">
               <a:rPr kumimoji="1" lang="ja-JP" altLang="en-US" smtClean="0"/>
               <a:t>2026/7/30</a:t>
             </a:fld>
@@ -2647,7 +2647,7 @@
           <p:cNvPr id="6" name="フッター プレースホルダー 5">
             <a:extLst>
               <a:ext uri="{FF2B5EF4-FFF2-40B4-BE49-F238E27FC236}">
-                <a16:creationId xmlns:a16="http://schemas.microsoft.com/office/drawing/2014/main" id="{9F76AC80-4320-67D4-B2E4-B8C7AC86EDDF}"/>
+                <a16:creationId xmlns:a16="http://schemas.microsoft.com/office/drawing/2014/main" id="{239FA79D-7DE3-1F1C-BA60-B2ECDFE8BB4F}"/>
               </a:ext>
             </a:extLst>
           </p:cNvPr>
@@ -2672,7 +2672,7 @@
           <p:cNvPr id="7" name="スライド番号プレースホルダー 6">
             <a:extLst>
               <a:ext uri="{FF2B5EF4-FFF2-40B4-BE49-F238E27FC236}">
-                <a16:creationId xmlns:a16="http://schemas.microsoft.com/office/drawing/2014/main" id="{AF5EF6AE-B394-95D8-D535-FBE2D186E56D}"/>
+                <a16:creationId xmlns:a16="http://schemas.microsoft.com/office/drawing/2014/main" id="{5149B73F-9643-FDFC-D9AD-740ACEDB27AC}"/>
               </a:ext>
             </a:extLst>
           </p:cNvPr>
@@ -2688,7 +2688,7 @@
           <a:bodyPr/>
           <a:lstStyle/>
           <a:p>
-            <a:fld id="{C84425DB-688B-4482-AE55-6B201D9BBEF1}" type="slidenum">
+            <a:fld id="{613F7437-989D-4ED3-87CB-CCDA4D9B197C}" type="slidenum">
               <a:rPr kumimoji="1" lang="ja-JP" altLang="en-US" smtClean="0"/>
               <a:t>‹#›</a:t>
             </a:fld>
@@ -2699,7 +2699,7 @@
     </p:spTree>
     <p:extLst>
       <p:ext uri="{BB962C8B-B14F-4D97-AF65-F5344CB8AC3E}">
-        <p14:creationId xmlns:p14="http://schemas.microsoft.com/office/powerpoint/2010/main" val="1615388814"/>
+        <p14:creationId xmlns:p14="http://schemas.microsoft.com/office/powerpoint/2010/main" val="1944661927"/>
       </p:ext>
     </p:extLst>
   </p:cSld>
@@ -2731,7 +2731,7 @@
           <p:cNvPr id="2" name="タイトル 1">
             <a:extLst>
               <a:ext uri="{FF2B5EF4-FFF2-40B4-BE49-F238E27FC236}">
-                <a16:creationId xmlns:a16="http://schemas.microsoft.com/office/drawing/2014/main" id="{3C7DA72C-3EB8-E266-48F8-8B1F022257AC}"/>
+                <a16:creationId xmlns:a16="http://schemas.microsoft.com/office/drawing/2014/main" id="{3767780C-AACF-C21C-77ED-0AAFEECCB91F}"/>
               </a:ext>
             </a:extLst>
           </p:cNvPr>
@@ -2768,7 +2768,7 @@
           <p:cNvPr id="3" name="図プレースホルダー 2">
             <a:extLst>
               <a:ext uri="{FF2B5EF4-FFF2-40B4-BE49-F238E27FC236}">
-                <a16:creationId xmlns:a16="http://schemas.microsoft.com/office/drawing/2014/main" id="{C5A2D828-B88F-085A-2D6B-2E7ED94626EA}"/>
+                <a16:creationId xmlns:a16="http://schemas.microsoft.com/office/drawing/2014/main" id="{49AE4F87-D8CA-96B1-0471-D089DEEEE86B}"/>
               </a:ext>
             </a:extLst>
           </p:cNvPr>
@@ -2835,7 +2835,7 @@
           <p:cNvPr id="4" name="テキスト プレースホルダー 3">
             <a:extLst>
               <a:ext uri="{FF2B5EF4-FFF2-40B4-BE49-F238E27FC236}">
-                <a16:creationId xmlns:a16="http://schemas.microsoft.com/office/drawing/2014/main" id="{082B5265-FFA4-5132-4F34-75327E89AFB2}"/>
+                <a16:creationId xmlns:a16="http://schemas.microsoft.com/office/drawing/2014/main" id="{BA4324B1-BFF4-0281-87C3-9E85FC31BE52}"/>
               </a:ext>
             </a:extLst>
           </p:cNvPr>
@@ -2906,7 +2906,7 @@
           <p:cNvPr id="5" name="日付プレースホルダー 4">
             <a:extLst>
               <a:ext uri="{FF2B5EF4-FFF2-40B4-BE49-F238E27FC236}">
-                <a16:creationId xmlns:a16="http://schemas.microsoft.com/office/drawing/2014/main" id="{F068D902-3265-1628-367B-5AF5F139EE8C}"/>
+                <a16:creationId xmlns:a16="http://schemas.microsoft.com/office/drawing/2014/main" id="{8C9376A3-AB21-6E3D-43DE-89958E32151D}"/>
               </a:ext>
             </a:extLst>
           </p:cNvPr>
@@ -2922,7 +2922,7 @@
           <a:bodyPr/>
           <a:lstStyle/>
           <a:p>
-            <a:fld id="{082D9B70-97B6-4B28-8800-3130777E9BCA}" type="datetimeFigureOut">
+            <a:fld id="{FA0CE7C4-3E40-4262-A7E1-B2C7E6252526}" type="datetimeFigureOut">
               <a:rPr kumimoji="1" lang="ja-JP" altLang="en-US" smtClean="0"/>
               <a:t>2026/7/30</a:t>
             </a:fld>
@@ -2935,7 +2935,7 @@
           <p:cNvPr id="6" name="フッター プレースホルダー 5">
             <a:extLst>
               <a:ext uri="{FF2B5EF4-FFF2-40B4-BE49-F238E27FC236}">
-                <a16:creationId xmlns:a16="http://schemas.microsoft.com/office/drawing/2014/main" id="{E47D4D62-935B-CE19-FFF2-B4A5353AF916}"/>
+                <a16:creationId xmlns:a16="http://schemas.microsoft.com/office/drawing/2014/main" id="{2D5A7CD1-C777-0EF2-1FCF-ED33311CE707}"/>
               </a:ext>
             </a:extLst>
           </p:cNvPr>
@@ -2960,7 +2960,7 @@
           <p:cNvPr id="7" name="スライド番号プレースホルダー 6">
             <a:extLst>
               <a:ext uri="{FF2B5EF4-FFF2-40B4-BE49-F238E27FC236}">
-                <a16:creationId xmlns:a16="http://schemas.microsoft.com/office/drawing/2014/main" id="{DB129958-133C-E733-1F5F-6C5FE8FD8A70}"/>
+                <a16:creationId xmlns:a16="http://schemas.microsoft.com/office/drawing/2014/main" id="{73243F30-4C7A-B2D6-0B42-E22758A811CE}"/>
               </a:ext>
             </a:extLst>
           </p:cNvPr>
@@ -2976,7 +2976,7 @@
           <a:bodyPr/>
           <a:lstStyle/>
           <a:p>
-            <a:fld id="{C84425DB-688B-4482-AE55-6B201D9BBEF1}" type="slidenum">
+            <a:fld id="{613F7437-989D-4ED3-87CB-CCDA4D9B197C}" type="slidenum">
               <a:rPr kumimoji="1" lang="ja-JP" altLang="en-US" smtClean="0"/>
               <a:t>‹#›</a:t>
             </a:fld>
@@ -2987,7 +2987,7 @@
     </p:spTree>
     <p:extLst>
       <p:ext uri="{BB962C8B-B14F-4D97-AF65-F5344CB8AC3E}">
-        <p14:creationId xmlns:p14="http://schemas.microsoft.com/office/powerpoint/2010/main" val="4095304340"/>
+        <p14:creationId xmlns:p14="http://schemas.microsoft.com/office/powerpoint/2010/main" val="75993385"/>
       </p:ext>
     </p:extLst>
   </p:cSld>
@@ -3024,7 +3024,7 @@
           <p:cNvPr id="2" name="タイトル プレースホルダー 1">
             <a:extLst>
               <a:ext uri="{FF2B5EF4-FFF2-40B4-BE49-F238E27FC236}">
-                <a16:creationId xmlns:a16="http://schemas.microsoft.com/office/drawing/2014/main" id="{997070CC-AAF4-1825-9909-8C7BAF46A9FE}"/>
+                <a16:creationId xmlns:a16="http://schemas.microsoft.com/office/drawing/2014/main" id="{3743CE5E-406D-309B-87EA-40F8A7462761}"/>
               </a:ext>
             </a:extLst>
           </p:cNvPr>
@@ -3062,7 +3062,7 @@
           <p:cNvPr id="3" name="テキスト プレースホルダー 2">
             <a:extLst>
               <a:ext uri="{FF2B5EF4-FFF2-40B4-BE49-F238E27FC236}">
-                <a16:creationId xmlns:a16="http://schemas.microsoft.com/office/drawing/2014/main" id="{696E52CB-FE1D-F99D-6B6A-9943CFB8F4E7}"/>
+                <a16:creationId xmlns:a16="http://schemas.microsoft.com/office/drawing/2014/main" id="{E0494F76-EAF9-36DA-C9E7-0040FEEF5189}"/>
               </a:ext>
             </a:extLst>
           </p:cNvPr>
@@ -3161,7 +3161,7 @@
           <p:cNvPr id="4" name="日付プレースホルダー 3">
             <a:extLst>
               <a:ext uri="{FF2B5EF4-FFF2-40B4-BE49-F238E27FC236}">
-                <a16:creationId xmlns:a16="http://schemas.microsoft.com/office/drawing/2014/main" id="{7B5A466C-53E2-7838-535B-9BC0F22EF0F7}"/>
+                <a16:creationId xmlns:a16="http://schemas.microsoft.com/office/drawing/2014/main" id="{B7093DA9-DDA4-41D4-FFFA-01293F20C5C3}"/>
               </a:ext>
             </a:extLst>
           </p:cNvPr>
@@ -3195,7 +3195,7 @@
             </a:lvl1pPr>
           </a:lstStyle>
           <a:p>
-            <a:fld id="{082D9B70-97B6-4B28-8800-3130777E9BCA}" type="datetimeFigureOut">
+            <a:fld id="{FA0CE7C4-3E40-4262-A7E1-B2C7E6252526}" type="datetimeFigureOut">
               <a:rPr kumimoji="1" lang="ja-JP" altLang="en-US" smtClean="0"/>
               <a:t>2026/7/30</a:t>
             </a:fld>
@@ -3208,7 +3208,7 @@
           <p:cNvPr id="5" name="フッター プレースホルダー 4">
             <a:extLst>
               <a:ext uri="{FF2B5EF4-FFF2-40B4-BE49-F238E27FC236}">
-                <a16:creationId xmlns:a16="http://schemas.microsoft.com/office/drawing/2014/main" id="{F14B90F9-BD74-506A-DEAB-D8C1F6055D0C}"/>
+                <a16:creationId xmlns:a16="http://schemas.microsoft.com/office/drawing/2014/main" id="{A72F12DC-DFEB-6485-6D13-08E40A02ACE3}"/>
               </a:ext>
             </a:extLst>
           </p:cNvPr>
@@ -3251,7 +3251,7 @@
           <p:cNvPr id="6" name="スライド番号プレースホルダー 5">
             <a:extLst>
               <a:ext uri="{FF2B5EF4-FFF2-40B4-BE49-F238E27FC236}">
-                <a16:creationId xmlns:a16="http://schemas.microsoft.com/office/drawing/2014/main" id="{AF2E7C94-338B-5F52-B973-B18FE6495A19}"/>
+                <a16:creationId xmlns:a16="http://schemas.microsoft.com/office/drawing/2014/main" id="{D5647B05-EBAD-2CA5-F58D-85C1A0109F3D}"/>
               </a:ext>
             </a:extLst>
           </p:cNvPr>
@@ -3285,7 +3285,7 @@
             </a:lvl1pPr>
           </a:lstStyle>
           <a:p>
-            <a:fld id="{C84425DB-688B-4482-AE55-6B201D9BBEF1}" type="slidenum">
+            <a:fld id="{613F7437-989D-4ED3-87CB-CCDA4D9B197C}" type="slidenum">
               <a:rPr kumimoji="1" lang="ja-JP" altLang="en-US" smtClean="0"/>
               <a:t>‹#›</a:t>
             </a:fld>
@@ -3296,7 +3296,7 @@
     </p:spTree>
     <p:extLst>
       <p:ext uri="{BB962C8B-B14F-4D97-AF65-F5344CB8AC3E}">
-        <p14:creationId xmlns:p14="http://schemas.microsoft.com/office/powerpoint/2010/main" val="2623526562"/>
+        <p14:creationId xmlns:p14="http://schemas.microsoft.com/office/powerpoint/2010/main" val="2507419631"/>
       </p:ext>
     </p:extLst>
   </p:cSld>
@@ -3619,7 +3619,7 @@
           <p:cNvPr id="2" name="テキスト ボックス 1">
             <a:extLst>
               <a:ext uri="{FF2B5EF4-FFF2-40B4-BE49-F238E27FC236}">
-                <a16:creationId xmlns:a16="http://schemas.microsoft.com/office/drawing/2014/main" id="{E19C8582-06F4-2609-0E2D-6983C7F899EB}"/>
+                <a16:creationId xmlns:a16="http://schemas.microsoft.com/office/drawing/2014/main" id="{82BC3FB9-69F6-4C4D-D2A8-909C37907879}"/>
               </a:ext>
             </a:extLst>
           </p:cNvPr>
@@ -3665,7 +3665,7 @@
           <p:cNvPr id="3" name="テキスト ボックス 2">
             <a:extLst>
               <a:ext uri="{FF2B5EF4-FFF2-40B4-BE49-F238E27FC236}">
-                <a16:creationId xmlns:a16="http://schemas.microsoft.com/office/drawing/2014/main" id="{CBD1429A-4419-5F37-0082-63A95EEC767C}"/>
+                <a16:creationId xmlns:a16="http://schemas.microsoft.com/office/drawing/2014/main" id="{D23280C1-4594-B222-D656-667AA7136485}"/>
               </a:ext>
             </a:extLst>
           </p:cNvPr>
@@ -3714,7 +3714,7 @@
           <p:cNvPr id="4" name="テキスト ボックス 3">
             <a:extLst>
               <a:ext uri="{FF2B5EF4-FFF2-40B4-BE49-F238E27FC236}">
-                <a16:creationId xmlns:a16="http://schemas.microsoft.com/office/drawing/2014/main" id="{F3F62819-6D9A-BFBC-84C4-7A086F55F9DF}"/>
+                <a16:creationId xmlns:a16="http://schemas.microsoft.com/office/drawing/2014/main" id="{4D33CA09-01F4-7FF3-5F0D-CF3B9215D7E4}"/>
               </a:ext>
             </a:extLst>
           </p:cNvPr>
@@ -3754,7 +3754,7 @@
           <p:cNvPr id="5" name="テキスト ボックス 4">
             <a:extLst>
               <a:ext uri="{FF2B5EF4-FFF2-40B4-BE49-F238E27FC236}">
-                <a16:creationId xmlns:a16="http://schemas.microsoft.com/office/drawing/2014/main" id="{76D11A72-7A95-66A0-9AE8-B7BA4A2EF294}"/>
+                <a16:creationId xmlns:a16="http://schemas.microsoft.com/office/drawing/2014/main" id="{CBA672BE-8530-3C3A-0844-8F93891C2CD5}"/>
               </a:ext>
             </a:extLst>
           </p:cNvPr>
@@ -3801,7 +3801,7 @@
             <a:hlinkClick r:id="" action="ppaction://media"/>
             <a:extLst>
               <a:ext uri="{FF2B5EF4-FFF2-40B4-BE49-F238E27FC236}">
-                <a16:creationId xmlns:a16="http://schemas.microsoft.com/office/drawing/2014/main" id="{6ACC1532-F8EE-6281-FFDD-27A0772529CB}"/>
+                <a16:creationId xmlns:a16="http://schemas.microsoft.com/office/drawing/2014/main" id="{E91A9B18-DCF5-3992-4A9B-0165BE8E6532}"/>
               </a:ext>
             </a:extLst>
           </p:cNvPr>
@@ -3836,7 +3836,7 @@
     </p:spTree>
     <p:extLst>
       <p:ext uri="{BB962C8B-B14F-4D97-AF65-F5344CB8AC3E}">
-        <p14:creationId xmlns:p14="http://schemas.microsoft.com/office/powerpoint/2010/main" val="3877308120"/>
+        <p14:creationId xmlns:p14="http://schemas.microsoft.com/office/powerpoint/2010/main" val="2740784100"/>
       </p:ext>
     </p:extLst>
   </p:cSld>
@@ -3960,7 +3960,7 @@
           <p:cNvPr id="2" name="テキスト ボックス 1">
             <a:extLst>
               <a:ext uri="{FF2B5EF4-FFF2-40B4-BE49-F238E27FC236}">
-                <a16:creationId xmlns:a16="http://schemas.microsoft.com/office/drawing/2014/main" id="{4ADE6959-6B16-C093-56CB-A3A505D05FD4}"/>
+                <a16:creationId xmlns:a16="http://schemas.microsoft.com/office/drawing/2014/main" id="{D3FC0F00-EC4E-7B06-D922-3E9418859CEE}"/>
               </a:ext>
             </a:extLst>
           </p:cNvPr>
@@ -4006,7 +4006,7 @@
           <p:cNvPr id="3" name="テキスト ボックス 2">
             <a:extLst>
               <a:ext uri="{FF2B5EF4-FFF2-40B4-BE49-F238E27FC236}">
-                <a16:creationId xmlns:a16="http://schemas.microsoft.com/office/drawing/2014/main" id="{9BDCC1A5-4628-DCBB-FF36-0BB05385B4D6}"/>
+                <a16:creationId xmlns:a16="http://schemas.microsoft.com/office/drawing/2014/main" id="{1742A9B5-C0E7-E3B1-A748-272FCC34827B}"/>
               </a:ext>
             </a:extLst>
           </p:cNvPr>
@@ -4046,7 +4046,7 @@
           <p:cNvPr id="4" name="テキスト ボックス 3">
             <a:extLst>
               <a:ext uri="{FF2B5EF4-FFF2-40B4-BE49-F238E27FC236}">
-                <a16:creationId xmlns:a16="http://schemas.microsoft.com/office/drawing/2014/main" id="{D53F17EF-D9A5-EAC9-66D5-886F42DDE1DF}"/>
+                <a16:creationId xmlns:a16="http://schemas.microsoft.com/office/drawing/2014/main" id="{B9166468-6EED-2C28-6D5B-A5A13A2911BD}"/>
               </a:ext>
             </a:extLst>
           </p:cNvPr>
@@ -4095,7 +4095,7 @@
           <p:cNvPr id="5" name="テキスト ボックス 4">
             <a:extLst>
               <a:ext uri="{FF2B5EF4-FFF2-40B4-BE49-F238E27FC236}">
-                <a16:creationId xmlns:a16="http://schemas.microsoft.com/office/drawing/2014/main" id="{B1A8AACD-B4D4-345C-3A57-9F6E57ECE3E2}"/>
+                <a16:creationId xmlns:a16="http://schemas.microsoft.com/office/drawing/2014/main" id="{BB4C3800-9710-D388-BEB2-1C544C18E095}"/>
               </a:ext>
             </a:extLst>
           </p:cNvPr>
@@ -4142,7 +4142,7 @@
             <a:hlinkClick r:id="" action="ppaction://media"/>
             <a:extLst>
               <a:ext uri="{FF2B5EF4-FFF2-40B4-BE49-F238E27FC236}">
-                <a16:creationId xmlns:a16="http://schemas.microsoft.com/office/drawing/2014/main" id="{BF9AA59B-030A-D571-5262-4177FF43283A}"/>
+                <a16:creationId xmlns:a16="http://schemas.microsoft.com/office/drawing/2014/main" id="{27928942-CFF1-20D3-1767-553313A70D71}"/>
               </a:ext>
             </a:extLst>
           </p:cNvPr>
@@ -4177,7 +4177,7 @@
     </p:spTree>
     <p:extLst>
       <p:ext uri="{BB962C8B-B14F-4D97-AF65-F5344CB8AC3E}">
-        <p14:creationId xmlns:p14="http://schemas.microsoft.com/office/powerpoint/2010/main" val="624751428"/>
+        <p14:creationId xmlns:p14="http://schemas.microsoft.com/office/powerpoint/2010/main" val="1039120088"/>
       </p:ext>
     </p:extLst>
   </p:cSld>
@@ -4301,7 +4301,7 @@
           <p:cNvPr id="2" name="テキスト ボックス 1">
             <a:extLst>
               <a:ext uri="{FF2B5EF4-FFF2-40B4-BE49-F238E27FC236}">
-                <a16:creationId xmlns:a16="http://schemas.microsoft.com/office/drawing/2014/main" id="{977F5801-3949-F15B-9203-DBE78BC8F27A}"/>
+                <a16:creationId xmlns:a16="http://schemas.microsoft.com/office/drawing/2014/main" id="{95BF4E5C-724D-DEDD-B666-31A8FC8AE658}"/>
               </a:ext>
             </a:extLst>
           </p:cNvPr>
@@ -4347,7 +4347,7 @@
           <p:cNvPr id="3" name="テキスト ボックス 2">
             <a:extLst>
               <a:ext uri="{FF2B5EF4-FFF2-40B4-BE49-F238E27FC236}">
-                <a16:creationId xmlns:a16="http://schemas.microsoft.com/office/drawing/2014/main" id="{B4FBC370-7470-A347-7D9E-A9B077F406F6}"/>
+                <a16:creationId xmlns:a16="http://schemas.microsoft.com/office/drawing/2014/main" id="{E33DCD36-BC6A-70E7-6F55-CFE3B45C3976}"/>
               </a:ext>
             </a:extLst>
           </p:cNvPr>
@@ -4387,7 +4387,7 @@
           <p:cNvPr id="4" name="テキスト ボックス 3">
             <a:extLst>
               <a:ext uri="{FF2B5EF4-FFF2-40B4-BE49-F238E27FC236}">
-                <a16:creationId xmlns:a16="http://schemas.microsoft.com/office/drawing/2014/main" id="{001AEC53-BB88-F379-2BBD-51F002BD9AD6}"/>
+                <a16:creationId xmlns:a16="http://schemas.microsoft.com/office/drawing/2014/main" id="{77D549DE-BBBE-529F-D170-C3E78D385352}"/>
               </a:ext>
             </a:extLst>
           </p:cNvPr>
@@ -4428,7 +4428,7 @@
           <p:cNvPr id="5" name="テキスト ボックス 4">
             <a:extLst>
               <a:ext uri="{FF2B5EF4-FFF2-40B4-BE49-F238E27FC236}">
-                <a16:creationId xmlns:a16="http://schemas.microsoft.com/office/drawing/2014/main" id="{83E46A90-2652-FFC0-8CFD-9F02CCD8C5FC}"/>
+                <a16:creationId xmlns:a16="http://schemas.microsoft.com/office/drawing/2014/main" id="{5DBC2A28-0AF3-C7BB-0B88-F6504F784CB3}"/>
               </a:ext>
             </a:extLst>
           </p:cNvPr>
@@ -4475,7 +4475,7 @@
             <a:hlinkClick r:id="" action="ppaction://media"/>
             <a:extLst>
               <a:ext uri="{FF2B5EF4-FFF2-40B4-BE49-F238E27FC236}">
-                <a16:creationId xmlns:a16="http://schemas.microsoft.com/office/drawing/2014/main" id="{DDBA6991-EFEC-5437-4C2A-01F34F174543}"/>
+                <a16:creationId xmlns:a16="http://schemas.microsoft.com/office/drawing/2014/main" id="{B7EA34EA-3963-F754-CF31-403CBF4FB3C5}"/>
               </a:ext>
             </a:extLst>
           </p:cNvPr>
@@ -4510,7 +4510,7 @@
     </p:spTree>
     <p:extLst>
       <p:ext uri="{BB962C8B-B14F-4D97-AF65-F5344CB8AC3E}">
-        <p14:creationId xmlns:p14="http://schemas.microsoft.com/office/powerpoint/2010/main" val="1609761687"/>
+        <p14:creationId xmlns:p14="http://schemas.microsoft.com/office/powerpoint/2010/main" val="1977377187"/>
       </p:ext>
     </p:extLst>
   </p:cSld>
@@ -4634,7 +4634,7 @@
           <p:cNvPr id="2" name="テキスト ボックス 1">
             <a:extLst>
               <a:ext uri="{FF2B5EF4-FFF2-40B4-BE49-F238E27FC236}">
-                <a16:creationId xmlns:a16="http://schemas.microsoft.com/office/drawing/2014/main" id="{C213BAEC-BA85-11B7-9F28-9BA8EA101D9F}"/>
+                <a16:creationId xmlns:a16="http://schemas.microsoft.com/office/drawing/2014/main" id="{A94C336A-A7AC-8D73-0433-C037685893E0}"/>
               </a:ext>
             </a:extLst>
           </p:cNvPr>
@@ -4680,7 +4680,7 @@
           <p:cNvPr id="3" name="テキスト ボックス 2">
             <a:extLst>
               <a:ext uri="{FF2B5EF4-FFF2-40B4-BE49-F238E27FC236}">
-                <a16:creationId xmlns:a16="http://schemas.microsoft.com/office/drawing/2014/main" id="{EFA318EF-AAE9-AF63-CA5D-61CA477CB8C3}"/>
+                <a16:creationId xmlns:a16="http://schemas.microsoft.com/office/drawing/2014/main" id="{F1C8D704-4F3F-F6B0-AE82-CB5A693D331A}"/>
               </a:ext>
             </a:extLst>
           </p:cNvPr>
@@ -4720,7 +4720,7 @@
           <p:cNvPr id="4" name="テキスト ボックス 3">
             <a:extLst>
               <a:ext uri="{FF2B5EF4-FFF2-40B4-BE49-F238E27FC236}">
-                <a16:creationId xmlns:a16="http://schemas.microsoft.com/office/drawing/2014/main" id="{A62857C2-E470-D1BE-28A7-B95F71CE8562}"/>
+                <a16:creationId xmlns:a16="http://schemas.microsoft.com/office/drawing/2014/main" id="{279CDD10-CD47-11D1-2D7F-3D5F6BDF2807}"/>
               </a:ext>
             </a:extLst>
           </p:cNvPr>
@@ -4779,7 +4779,7 @@
           <p:cNvPr id="5" name="テキスト ボックス 4">
             <a:extLst>
               <a:ext uri="{FF2B5EF4-FFF2-40B4-BE49-F238E27FC236}">
-                <a16:creationId xmlns:a16="http://schemas.microsoft.com/office/drawing/2014/main" id="{981ECA45-E305-2A7F-70EF-0E72A299E7EE}"/>
+                <a16:creationId xmlns:a16="http://schemas.microsoft.com/office/drawing/2014/main" id="{8ADC6A4D-C946-CEDC-475C-E128EB48639D}"/>
               </a:ext>
             </a:extLst>
           </p:cNvPr>
@@ -4826,7 +4826,7 @@
             <a:hlinkClick r:id="" action="ppaction://media"/>
             <a:extLst>
               <a:ext uri="{FF2B5EF4-FFF2-40B4-BE49-F238E27FC236}">
-                <a16:creationId xmlns:a16="http://schemas.microsoft.com/office/drawing/2014/main" id="{64D9869E-D484-F5D9-3D85-D1484B6235BE}"/>
+                <a16:creationId xmlns:a16="http://schemas.microsoft.com/office/drawing/2014/main" id="{4587F40B-CA21-9298-E233-441A0D2E2444}"/>
               </a:ext>
             </a:extLst>
           </p:cNvPr>
@@ -4861,7 +4861,7 @@
     </p:spTree>
     <p:extLst>
       <p:ext uri="{BB962C8B-B14F-4D97-AF65-F5344CB8AC3E}">
-        <p14:creationId xmlns:p14="http://schemas.microsoft.com/office/powerpoint/2010/main" val="2282728755"/>
+        <p14:creationId xmlns:p14="http://schemas.microsoft.com/office/powerpoint/2010/main" val="1568106488"/>
       </p:ext>
     </p:extLst>
   </p:cSld>
@@ -4985,7 +4985,7 @@
           <p:cNvPr id="2" name="テキスト ボックス 1">
             <a:extLst>
               <a:ext uri="{FF2B5EF4-FFF2-40B4-BE49-F238E27FC236}">
-                <a16:creationId xmlns:a16="http://schemas.microsoft.com/office/drawing/2014/main" id="{3816E6BC-430A-D84E-B1AA-CEB3FE89E9C9}"/>
+                <a16:creationId xmlns:a16="http://schemas.microsoft.com/office/drawing/2014/main" id="{2CDC767D-D207-25C9-1DE7-1C6F1EF32105}"/>
               </a:ext>
             </a:extLst>
           </p:cNvPr>
@@ -5031,7 +5031,7 @@
           <p:cNvPr id="3" name="テキスト ボックス 2">
             <a:extLst>
               <a:ext uri="{FF2B5EF4-FFF2-40B4-BE49-F238E27FC236}">
-                <a16:creationId xmlns:a16="http://schemas.microsoft.com/office/drawing/2014/main" id="{BED7A9EF-431A-AD01-391A-802CB6C1ED34}"/>
+                <a16:creationId xmlns:a16="http://schemas.microsoft.com/office/drawing/2014/main" id="{3223C9F2-0473-07EE-BCE9-19F9FF03C639}"/>
               </a:ext>
             </a:extLst>
           </p:cNvPr>
@@ -5071,7 +5071,7 @@
           <p:cNvPr id="4" name="テキスト ボックス 3">
             <a:extLst>
               <a:ext uri="{FF2B5EF4-FFF2-40B4-BE49-F238E27FC236}">
-                <a16:creationId xmlns:a16="http://schemas.microsoft.com/office/drawing/2014/main" id="{B774A3D2-A4F8-189B-3A2B-5E3D5929722D}"/>
+                <a16:creationId xmlns:a16="http://schemas.microsoft.com/office/drawing/2014/main" id="{4E99EB0E-7A0D-333E-C267-41506194AC27}"/>
               </a:ext>
             </a:extLst>
           </p:cNvPr>
@@ -5095,20 +5095,14 @@
           <a:lstStyle/>
           <a:p>
             <a:r>
-              <a:rPr kumimoji="1" lang="en-US" altLang="ja-JP" sz="2000">
+              <a:rPr kumimoji="1" lang="ja-JP" altLang="en-US" sz="2000">
                 <a:solidFill>
                   <a:srgbClr val="333333"/>
                 </a:solidFill>
                 <a:latin typeface="Arial" panose="020B0604020202020204" pitchFamily="34" charset="0"/>
               </a:rPr>
-              <a:t>Initialize repository</a:t>
-            </a:r>
-            <a:endParaRPr kumimoji="1" lang="ja-JP" altLang="en-US" sz="2000">
-              <a:solidFill>
-                <a:srgbClr val="333333"/>
-              </a:solidFill>
-              <a:latin typeface="Arial" panose="020B0604020202020204" pitchFamily="34" charset="0"/>
-            </a:endParaRPr>
+              <a:t>直近のコミットでは、プロジェクトの初期構成と開発基盤が整備されました。</a:t>
+            </a:r>
           </a:p>
         </p:txBody>
       </p:sp>
@@ -5117,7 +5111,7 @@
           <p:cNvPr id="5" name="テキスト ボックス 4">
             <a:extLst>
               <a:ext uri="{FF2B5EF4-FFF2-40B4-BE49-F238E27FC236}">
-                <a16:creationId xmlns:a16="http://schemas.microsoft.com/office/drawing/2014/main" id="{C112DB77-551D-00AF-9FC2-E7BCA3DE53E3}"/>
+                <a16:creationId xmlns:a16="http://schemas.microsoft.com/office/drawing/2014/main" id="{572CDF6C-F41E-80A2-460E-196557BA799D}"/>
               </a:ext>
             </a:extLst>
           </p:cNvPr>
@@ -5164,7 +5158,7 @@
             <a:hlinkClick r:id="" action="ppaction://media"/>
             <a:extLst>
               <a:ext uri="{FF2B5EF4-FFF2-40B4-BE49-F238E27FC236}">
-                <a16:creationId xmlns:a16="http://schemas.microsoft.com/office/drawing/2014/main" id="{A7B4770B-81E5-E7E8-0EFE-8F031B07EB14}"/>
+                <a16:creationId xmlns:a16="http://schemas.microsoft.com/office/drawing/2014/main" id="{E5B63AD7-D0EB-0F6A-171C-761CA549A7D8}"/>
               </a:ext>
             </a:extLst>
           </p:cNvPr>
@@ -5199,7 +5193,7 @@
     </p:spTree>
     <p:extLst>
       <p:ext uri="{BB962C8B-B14F-4D97-AF65-F5344CB8AC3E}">
-        <p14:creationId xmlns:p14="http://schemas.microsoft.com/office/powerpoint/2010/main" val="2042771839"/>
+        <p14:creationId xmlns:p14="http://schemas.microsoft.com/office/powerpoint/2010/main" val="241147451"/>
       </p:ext>
     </p:extLst>
   </p:cSld>
@@ -5208,10 +5202,10 @@
   </p:clrMapOvr>
   <mc:AlternateContent xmlns:mc="http://schemas.openxmlformats.org/markup-compatibility/2006">
     <mc:Choice xmlns:p14="http://schemas.microsoft.com/office/powerpoint/2010/main" Requires="p14">
-      <p:transition spd="slow" p14:dur="2000" advTm="6000"/>
+      <p:transition spd="slow" p14:dur="2000" advTm="7000"/>
     </mc:Choice>
     <mc:Fallback>
-      <p:transition spd="slow" advTm="6000"/>
+      <p:transition spd="slow" advTm="7000"/>
     </mc:Fallback>
   </mc:AlternateContent>
   <p:timing>
@@ -5242,7 +5236,7 @@
                                   <p:childTnLst>
                                     <p:cmd type="call" cmd="playFrom(0.0)">
                                       <p:cBhvr>
-                                        <p:cTn id="6" dur="5687" fill="hold"/>
+                                        <p:cTn id="6" dur="6126" fill="hold"/>
                                         <p:tgtEl>
                                           <p:spTgt spid="6"/>
                                         </p:tgtEl>
@@ -5323,7 +5317,7 @@
           <p:cNvPr id="2" name="テキスト ボックス 1">
             <a:extLst>
               <a:ext uri="{FF2B5EF4-FFF2-40B4-BE49-F238E27FC236}">
-                <a16:creationId xmlns:a16="http://schemas.microsoft.com/office/drawing/2014/main" id="{53575E82-3CB9-BC5B-4263-F7E1F1A54262}"/>
+                <a16:creationId xmlns:a16="http://schemas.microsoft.com/office/drawing/2014/main" id="{CFB8428C-C453-AB8B-7A6A-3CBD1C371EFC}"/>
               </a:ext>
             </a:extLst>
           </p:cNvPr>
@@ -5369,7 +5363,7 @@
           <p:cNvPr id="3" name="テキスト ボックス 2">
             <a:extLst>
               <a:ext uri="{FF2B5EF4-FFF2-40B4-BE49-F238E27FC236}">
-                <a16:creationId xmlns:a16="http://schemas.microsoft.com/office/drawing/2014/main" id="{7EAC11E7-1D9D-D6D4-3263-C27CBF6669D3}"/>
+                <a16:creationId xmlns:a16="http://schemas.microsoft.com/office/drawing/2014/main" id="{72D5F284-86EC-1302-4413-9AA7605727C0}"/>
               </a:ext>
             </a:extLst>
           </p:cNvPr>
@@ -5409,7 +5403,7 @@
           <p:cNvPr id="4" name="テキスト ボックス 3">
             <a:extLst>
               <a:ext uri="{FF2B5EF4-FFF2-40B4-BE49-F238E27FC236}">
-                <a16:creationId xmlns:a16="http://schemas.microsoft.com/office/drawing/2014/main" id="{D0F7F0A4-4D2C-79F7-9B88-08AAD8789A78}"/>
+                <a16:creationId xmlns:a16="http://schemas.microsoft.com/office/drawing/2014/main" id="{B5AF068D-25D9-F697-CDD5-D9C5BAEC126D}"/>
               </a:ext>
             </a:extLst>
           </p:cNvPr>
@@ -5474,7 +5468,7 @@
           <p:cNvPr id="5" name="テキスト ボックス 4">
             <a:extLst>
               <a:ext uri="{FF2B5EF4-FFF2-40B4-BE49-F238E27FC236}">
-                <a16:creationId xmlns:a16="http://schemas.microsoft.com/office/drawing/2014/main" id="{5E2501C1-E4D1-62AE-AD65-2FB4FCB7B802}"/>
+                <a16:creationId xmlns:a16="http://schemas.microsoft.com/office/drawing/2014/main" id="{BA1F38F7-F42D-7477-F434-B436F0E81D2B}"/>
               </a:ext>
             </a:extLst>
           </p:cNvPr>
@@ -5521,7 +5515,7 @@
             <a:hlinkClick r:id="" action="ppaction://media"/>
             <a:extLst>
               <a:ext uri="{FF2B5EF4-FFF2-40B4-BE49-F238E27FC236}">
-                <a16:creationId xmlns:a16="http://schemas.microsoft.com/office/drawing/2014/main" id="{A23F1B2F-CB02-8A62-030E-F150516AD4E5}"/>
+                <a16:creationId xmlns:a16="http://schemas.microsoft.com/office/drawing/2014/main" id="{BD0DCCE4-E34D-5DCE-F92C-5FD72C6C9A4C}"/>
               </a:ext>
             </a:extLst>
           </p:cNvPr>
@@ -5556,7 +5550,7 @@
     </p:spTree>
     <p:extLst>
       <p:ext uri="{BB962C8B-B14F-4D97-AF65-F5344CB8AC3E}">
-        <p14:creationId xmlns:p14="http://schemas.microsoft.com/office/powerpoint/2010/main" val="4194079197"/>
+        <p14:creationId xmlns:p14="http://schemas.microsoft.com/office/powerpoint/2010/main" val="318877839"/>
       </p:ext>
     </p:extLst>
   </p:cSld>
